--- a/rapports/septembre/Monoprix_sept2026.pptx
+++ b/rapports/septembre/Monoprix_sept2026.pptx
@@ -6235,7 +6235,7 @@
         <p:spPr>
           <a:xfrm>
             <a:off x="8296656" y="4389120"/>
-            <a:ext cx="2072640" cy="152400"/>
+            <a:ext cx="2225040" cy="152400"/>
           </a:xfrm>
           <a:prstGeom prst="rect">
             <a:avLst/>
@@ -6250,13 +6250,13 @@
           <a:p>
             <a:pPr algn="l"/>
             <a:r>
-              <a:rPr sz="1000" b="0" i="0">
+              <a:rPr sz="800" b="0" i="0">
                 <a:solidFill>
                   <a:srgbClr val="111111"/>
                 </a:solidFill>
                 <a:latin typeface="Arial"/>
               </a:rPr>
-              <a:t>Vêtements</a:t>
+              <a:t>Collants, chaussettes et sous-vêtements</a:t>
             </a:r>
           </a:p>
         </p:txBody>
@@ -6314,7 +6314,7 @@
         <p:spPr>
           <a:xfrm>
             <a:off x="8296656" y="4657344"/>
-            <a:ext cx="2072640" cy="152400"/>
+            <a:ext cx="2225040" cy="152400"/>
           </a:xfrm>
           <a:prstGeom prst="rect">
             <a:avLst/>
@@ -6335,7 +6335,7 @@
                 </a:solidFill>
                 <a:latin typeface="Arial"/>
               </a:rPr>
-              <a:t>Sport et plein air · 27 %</a:t>
+              <a:t>Petit équipement domestique · 9 %</a:t>
             </a:r>
           </a:p>
         </p:txBody>
@@ -6393,7 +6393,7 @@
         <p:spPr>
           <a:xfrm>
             <a:off x="8296656" y="4925568"/>
-            <a:ext cx="2072640" cy="152400"/>
+            <a:ext cx="2225040" cy="152400"/>
           </a:xfrm>
           <a:prstGeom prst="rect">
             <a:avLst/>
@@ -6408,13 +6408,13 @@
           <a:p>
             <a:pPr algn="l"/>
             <a:r>
-              <a:rPr sz="1000" b="0" i="0">
+              <a:rPr sz="800" b="0" i="0">
                 <a:solidFill>
                   <a:srgbClr val="111111"/>
                 </a:solidFill>
                 <a:latin typeface="Arial"/>
               </a:rPr>
-              <a:t>Chaussures · 19 %</a:t>
+              <a:t>Papeterie scolaire et créative · 6 %</a:t>
             </a:r>
           </a:p>
         </p:txBody>
@@ -6472,7 +6472,7 @@
         <p:spPr>
           <a:xfrm>
             <a:off x="8296656" y="5193792"/>
-            <a:ext cx="2072640" cy="152400"/>
+            <a:ext cx="2225040" cy="152400"/>
           </a:xfrm>
           <a:prstGeom prst="rect">
             <a:avLst/>
@@ -6487,13 +6487,13 @@
           <a:p>
             <a:pPr algn="l"/>
             <a:r>
-              <a:rPr sz="1000" b="0" i="0">
+              <a:rPr sz="800" b="0" i="0">
                 <a:solidFill>
                   <a:srgbClr val="111111"/>
                 </a:solidFill>
                 <a:latin typeface="Arial"/>
               </a:rPr>
-              <a:t>Montres et bijoux · 11 %</a:t>
+              <a:t>Vêtements et linge pour bébé · 1 %</a:t>
             </a:r>
           </a:p>
         </p:txBody>
@@ -6506,87 +6506,8 @@
         </p:nvSpPr>
         <p:spPr>
           <a:xfrm>
-            <a:off x="8077200" y="5480304"/>
-            <a:ext cx="121920" cy="121920"/>
-          </a:xfrm>
-          <a:prstGeom prst="rect">
-            <a:avLst/>
-          </a:prstGeom>
-          <a:solidFill>
-            <a:srgbClr val="3E5A78"/>
-          </a:solidFill>
-          <a:ln>
-            <a:noFill/>
-          </a:ln>
-          <a:effectLst/>
-        </p:spPr>
-        <p:style>
-          <a:lnRef idx="1">
-            <a:schemeClr val="accent1"/>
-          </a:lnRef>
-          <a:fillRef idx="3">
-            <a:schemeClr val="accent1"/>
-          </a:fillRef>
-          <a:effectRef idx="2">
-            <a:schemeClr val="accent1"/>
-          </a:effectRef>
-          <a:fontRef idx="minor">
-            <a:schemeClr val="lt1"/>
-          </a:fontRef>
-        </p:style>
-        <p:txBody>
-          <a:bodyPr rtlCol="0" anchor="ctr"/>
-          <a:lstStyle/>
-          <a:p>
-            <a:pPr algn="ctr"/>
-          </a:p>
-        </p:txBody>
-      </p:sp>
-      <p:sp>
-        <p:nvSpPr>
-          <p:cNvPr id="89" name="TextBox 88"/>
-          <p:cNvSpPr txBox="1"/>
-          <p:nvPr/>
-        </p:nvSpPr>
-        <p:spPr>
-          <a:xfrm>
-            <a:off x="8296656" y="5462016"/>
-            <a:ext cx="2072640" cy="152400"/>
-          </a:xfrm>
-          <a:prstGeom prst="rect">
-            <a:avLst/>
-          </a:prstGeom>
-          <a:noFill/>
-        </p:spPr>
-        <p:txBody>
-          <a:bodyPr wrap="square" anchor="t" lIns="0" rIns="0" tIns="0" bIns="0">
-            <a:spAutoFit/>
-          </a:bodyPr>
-          <a:lstStyle/>
-          <a:p>
-            <a:pPr algn="l"/>
-            <a:r>
-              <a:rPr sz="1000" b="0" i="0">
-                <a:solidFill>
-                  <a:srgbClr val="111111"/>
-                </a:solidFill>
-                <a:latin typeface="Arial"/>
-              </a:rPr>
-              <a:t>Accessoires · 5 %</a:t>
-            </a:r>
-          </a:p>
-        </p:txBody>
-      </p:sp>
-      <p:sp>
-        <p:nvSpPr>
-          <p:cNvPr id="90" name="Rectangle 89"/>
-          <p:cNvSpPr/>
-          <p:nvPr/>
-        </p:nvSpPr>
-        <p:spPr>
-          <a:xfrm>
             <a:off x="10564368" y="4450080"/>
-            <a:ext cx="475488" cy="509625"/>
+            <a:ext cx="475488" cy="1126540"/>
           </a:xfrm>
           <a:prstGeom prst="rect">
             <a:avLst/>
@@ -6623,14 +6544,14 @@
       </p:sp>
       <p:sp>
         <p:nvSpPr>
-          <p:cNvPr id="91" name="TextBox 90"/>
+          <p:cNvPr id="89" name="TextBox 88"/>
           <p:cNvSpPr txBox="1"/>
           <p:nvPr/>
         </p:nvSpPr>
         <p:spPr>
           <a:xfrm>
             <a:off x="10564368" y="4450080"/>
-            <a:ext cx="475488" cy="509625"/>
+            <a:ext cx="475488" cy="1126540"/>
           </a:xfrm>
           <a:prstGeom prst="rect">
             <a:avLst/>
@@ -6651,21 +6572,21 @@
                 </a:solidFill>
                 <a:latin typeface="Arial"/>
               </a:rPr>
-              <a:t>38 %</a:t>
-            </a:r>
-          </a:p>
-        </p:txBody>
-      </p:sp>
-      <p:sp>
-        <p:nvSpPr>
-          <p:cNvPr id="92" name="Rectangle 91"/>
+              <a:t>84 %</a:t>
+            </a:r>
+          </a:p>
+        </p:txBody>
+      </p:sp>
+      <p:sp>
+        <p:nvSpPr>
+          <p:cNvPr id="90" name="Rectangle 89"/>
           <p:cNvSpPr/>
           <p:nvPr/>
         </p:nvSpPr>
         <p:spPr>
           <a:xfrm>
-            <a:off x="10564368" y="4959705"/>
-            <a:ext cx="475488" cy="362102"/>
+            <a:off x="10564368" y="5576620"/>
+            <a:ext cx="475488" cy="120700"/>
           </a:xfrm>
           <a:prstGeom prst="rect">
             <a:avLst/>
@@ -6702,49 +6623,14 @@
       </p:sp>
       <p:sp>
         <p:nvSpPr>
-          <p:cNvPr id="93" name="TextBox 92"/>
-          <p:cNvSpPr txBox="1"/>
-          <p:nvPr/>
-        </p:nvSpPr>
-        <p:spPr>
-          <a:xfrm>
-            <a:off x="10564368" y="4959705"/>
-            <a:ext cx="475488" cy="362102"/>
-          </a:xfrm>
-          <a:prstGeom prst="rect">
-            <a:avLst/>
-          </a:prstGeom>
-          <a:noFill/>
-        </p:spPr>
-        <p:txBody>
-          <a:bodyPr wrap="square" anchor="ctr" lIns="0" rIns="0" tIns="0" bIns="0">
-            <a:spAutoFit/>
-          </a:bodyPr>
-          <a:lstStyle/>
-          <a:p>
-            <a:pPr algn="ctr"/>
-            <a:r>
-              <a:rPr sz="1000" b="1" i="0">
-                <a:solidFill>
-                  <a:srgbClr val="FFFFFF"/>
-                </a:solidFill>
-                <a:latin typeface="Arial"/>
-              </a:rPr>
-              <a:t>27 %</a:t>
-            </a:r>
-          </a:p>
-        </p:txBody>
-      </p:sp>
-      <p:sp>
-        <p:nvSpPr>
-          <p:cNvPr id="94" name="Rectangle 93"/>
+          <p:cNvPr id="91" name="Rectangle 90"/>
           <p:cNvSpPr/>
           <p:nvPr/>
         </p:nvSpPr>
         <p:spPr>
           <a:xfrm>
-            <a:off x="10564368" y="5321808"/>
-            <a:ext cx="475488" cy="254812"/>
+            <a:off x="10564368" y="5697321"/>
+            <a:ext cx="475488" cy="80467"/>
           </a:xfrm>
           <a:prstGeom prst="rect">
             <a:avLst/>
@@ -6781,64 +6667,20 @@
       </p:sp>
       <p:sp>
         <p:nvSpPr>
-          <p:cNvPr id="95" name="Rectangle 94"/>
+          <p:cNvPr id="92" name="Rectangle 91"/>
           <p:cNvSpPr/>
           <p:nvPr/>
         </p:nvSpPr>
         <p:spPr>
           <a:xfrm>
-            <a:off x="10564368" y="5576620"/>
-            <a:ext cx="475488" cy="147523"/>
+            <a:off x="10564368" y="5777788"/>
+            <a:ext cx="475488" cy="13411"/>
           </a:xfrm>
           <a:prstGeom prst="rect">
             <a:avLst/>
           </a:prstGeom>
           <a:solidFill>
             <a:srgbClr val="EE6A2C"/>
-          </a:solidFill>
-          <a:ln>
-            <a:noFill/>
-          </a:ln>
-          <a:effectLst/>
-        </p:spPr>
-        <p:style>
-          <a:lnRef idx="1">
-            <a:schemeClr val="accent1"/>
-          </a:lnRef>
-          <a:fillRef idx="3">
-            <a:schemeClr val="accent1"/>
-          </a:fillRef>
-          <a:effectRef idx="2">
-            <a:schemeClr val="accent1"/>
-          </a:effectRef>
-          <a:fontRef idx="minor">
-            <a:schemeClr val="lt1"/>
-          </a:fontRef>
-        </p:style>
-        <p:txBody>
-          <a:bodyPr rtlCol="0" anchor="ctr"/>
-          <a:lstStyle/>
-          <a:p>
-            <a:pPr algn="ctr"/>
-          </a:p>
-        </p:txBody>
-      </p:sp>
-      <p:sp>
-        <p:nvSpPr>
-          <p:cNvPr id="96" name="Rectangle 95"/>
-          <p:cNvSpPr/>
-          <p:nvPr/>
-        </p:nvSpPr>
-        <p:spPr>
-          <a:xfrm>
-            <a:off x="10564368" y="5724144"/>
-            <a:ext cx="475488" cy="67056"/>
-          </a:xfrm>
-          <a:prstGeom prst="rect">
-            <a:avLst/>
-          </a:prstGeom>
-          <a:solidFill>
-            <a:srgbClr val="3E5A78"/>
           </a:solidFill>
           <a:ln>
             <a:noFill/>

--- a/rapports/septembre/Monoprix_sept2026.pptx
+++ b/rapports/septembre/Monoprix_sept2026.pptx
@@ -6329,13 +6329,13 @@
           <a:p>
             <a:pPr algn="l"/>
             <a:r>
-              <a:rPr sz="1000" b="0" i="0">
+              <a:rPr sz="800" b="0" i="0">
                 <a:solidFill>
                   <a:srgbClr val="111111"/>
                 </a:solidFill>
                 <a:latin typeface="Arial"/>
               </a:rPr>
-              <a:t>Petit équipement domestique · 9 %</a:t>
+              <a:t>Petit équipement domestique · 15 %</a:t>
             </a:r>
           </a:p>
         </p:txBody>
@@ -6414,7 +6414,7 @@
                 </a:solidFill>
                 <a:latin typeface="Arial"/>
               </a:rPr>
-              <a:t>Papeterie scolaire et créative · 6 %</a:t>
+              <a:t>Papeterie scolaire et créative · 23 %</a:t>
             </a:r>
           </a:p>
         </p:txBody>
@@ -6493,7 +6493,7 @@
                 </a:solidFill>
                 <a:latin typeface="Arial"/>
               </a:rPr>
-              <a:t>Vêtements et linge pour bébé · 1 %</a:t>
+              <a:t>Vêtements et linge pour bébé · 18 %</a:t>
             </a:r>
           </a:p>
         </p:txBody>
@@ -6507,7 +6507,7 @@
         <p:spPr>
           <a:xfrm>
             <a:off x="10564368" y="4450080"/>
-            <a:ext cx="475488" cy="1126540"/>
+            <a:ext cx="475488" cy="590092"/>
           </a:xfrm>
           <a:prstGeom prst="rect">
             <a:avLst/>
@@ -6551,7 +6551,7 @@
         <p:spPr>
           <a:xfrm>
             <a:off x="10564368" y="4450080"/>
-            <a:ext cx="475488" cy="1126540"/>
+            <a:ext cx="475488" cy="590092"/>
           </a:xfrm>
           <a:prstGeom prst="rect">
             <a:avLst/>
@@ -6572,7 +6572,7 @@
                 </a:solidFill>
                 <a:latin typeface="Arial"/>
               </a:rPr>
-              <a:t>84 %</a:t>
+              <a:t>44 %</a:t>
             </a:r>
           </a:p>
         </p:txBody>
@@ -6585,8 +6585,8 @@
         </p:nvSpPr>
         <p:spPr>
           <a:xfrm>
-            <a:off x="10564368" y="5576620"/>
-            <a:ext cx="475488" cy="120700"/>
+            <a:off x="10564368" y="5040172"/>
+            <a:ext cx="475488" cy="201168"/>
           </a:xfrm>
           <a:prstGeom prst="rect">
             <a:avLst/>
@@ -6629,8 +6629,8 @@
         </p:nvSpPr>
         <p:spPr>
           <a:xfrm>
-            <a:off x="10564368" y="5697321"/>
-            <a:ext cx="475488" cy="80467"/>
+            <a:off x="10564368" y="5241340"/>
+            <a:ext cx="475488" cy="308457"/>
           </a:xfrm>
           <a:prstGeom prst="rect">
             <a:avLst/>
@@ -6673,8 +6673,8 @@
         </p:nvSpPr>
         <p:spPr>
           <a:xfrm>
-            <a:off x="10564368" y="5777788"/>
-            <a:ext cx="475488" cy="13411"/>
+            <a:off x="10564368" y="5549798"/>
+            <a:ext cx="475488" cy="241401"/>
           </a:xfrm>
           <a:prstGeom prst="rect">
             <a:avLst/>
@@ -7110,7 +7110,7 @@
                 </a:solidFill>
                 <a:latin typeface="Arial"/>
               </a:rPr>
-              <a:t>Le mariage, premier déclencheur</a:t>
+              <a:t>Les collants restent le point fort</a:t>
             </a:r>
           </a:p>
         </p:txBody>
@@ -7145,7 +7145,7 @@
                 </a:solidFill>
                 <a:latin typeface="Arial"/>
               </a:rPr>
-              <a:t>Le mariage déclenche 29,1 % des conversations, devant le départ en vacances (16,6 %) et la rentrée (12,0 %).</a:t>
+              <a:t>Les collants Sublim DIM et les bas nylon atteignent jusqu'à 1,26 fois le CTR moyen.</a:t>
             </a:r>
           </a:p>
         </p:txBody>
@@ -7180,7 +7180,7 @@
                 </a:solidFill>
                 <a:latin typeface="Arial"/>
               </a:rPr>
-              <a:t>→  Créer des accroches « tenue d'invitée » et « look de cérémonie » avec les robes et ensembles Monoprix.</a:t>
+              <a:t>→  Garder les collants au cœur de la campagne, surtout avec l'arrivée du froid.</a:t>
             </a:r>
           </a:p>
         </p:txBody>
@@ -7296,7 +7296,7 @@
                 </a:solidFill>
                 <a:latin typeface="Arial"/>
               </a:rPr>
-              <a:t>Préparer la saison froide</a:t>
+              <a:t>La papeterie scolaire surprend</a:t>
             </a:r>
           </a:p>
         </p:txBody>
@@ -7331,7 +7331,7 @@
                 </a:solidFill>
                 <a:latin typeface="Arial"/>
               </a:rPr>
-              <a:t>Doudounes, vestes, collants thermiques et gants apparaissent déjà dans les requêtes de septembre.</a:t>
+              <a:t>Les pochettes de papier à dessin Canson atteignent 1,23 fois la moyenne, et les fournitures scolaires 1,15 fois.</a:t>
             </a:r>
           </a:p>
         </p:txBody>
@@ -7366,7 +7366,7 @@
                 </a:solidFill>
                 <a:latin typeface="Arial"/>
               </a:rPr>
-              <a:t>→  Basculer les messages vers les manteaux, mailles et collants dès octobre.</a:t>
+              <a:t>→  Profiter de la rentrée pour garder la papeterie dans la diffusion.</a:t>
             </a:r>
           </a:p>
         </p:txBody>
@@ -7482,7 +7482,7 @@
                 </a:solidFill>
                 <a:latin typeface="Arial"/>
               </a:rPr>
-              <a:t>Clarifier la mesure de part de voix</a:t>
+              <a:t>Revoir la lingerie et le linge de maison</a:t>
             </a:r>
           </a:p>
         </p:txBody>
@@ -7517,7 +7517,7 @@
                 </a:solidFill>
                 <a:latin typeface="Arial"/>
               </a:rPr>
-              <a:t>Le rapport d'insights mesure Monoprix face aux enseignes alimentaires (Lidl, Leclerc…) : 5,5 % de part de voix (+2,5 pts), 24,2 % côté ads (+6,1 pts).</a:t>
+              <a:t>Les lots de slips DIM (0,86 fois) et le drap housse bio (0,77 fois) restent sous la moyenne.</a:t>
             </a:r>
           </a:p>
         </p:txBody>
@@ -7552,7 +7552,7 @@
                 </a:solidFill>
                 <a:latin typeface="Arial"/>
               </a:rPr>
-              <a:t>→  À vérifier : refaire la mesure face aux enseignes de mode pour un comparatif pertinent.</a:t>
+              <a:t>→  Mettre en avant un bénéfice concret (confort, maintien) plutôt que le lot.</a:t>
             </a:r>
           </a:p>
         </p:txBody>
@@ -7703,7 +7703,7 @@
                 </a:solidFill>
                 <a:latin typeface="Arial"/>
               </a:rPr>
-              <a:t>Les impressions baissent de 52 %, mais les clics progressent de 24 %. Le CTR passe de 0,19 % à 0,48 %. Aucune conversion n'est encore attribuée.</a:t>
+              <a:t>Les impressions baissent de 52 % mais les clics progressent de 24 %. Le CTR passe de 0,19 % à 0,48 %.</a:t>
             </a:r>
           </a:p>
         </p:txBody>
@@ -7738,7 +7738,7 @@
                 </a:solidFill>
                 <a:latin typeface="Arial"/>
               </a:rPr>
-              <a:t>→  Vérifier le tracking Kwanko et miser sur les catégories qui cliquent le plus.</a:t>
+              <a:t>→  Vérifier le tracking des conversions.</a:t>
             </a:r>
           </a:p>
         </p:txBody>
